--- a/atelier/atelier-h03-reviews.pptx
+++ b/atelier/atelier-h03-reviews.pptx
@@ -3316,7 +3316,7 @@
         </p:nvSpPr>
         <p:spPr>
           <a:xfrm>
-            <a:off x="5089618" y="5623018"/>
+            <a:off x="5089618" y="5652784"/>
             <a:ext cx="107763" cy="107763"/>
           </a:xfrm>
           <a:prstGeom prst="rect">
@@ -3360,7 +3360,7 @@
         </p:nvSpPr>
         <p:spPr>
           <a:xfrm>
-            <a:off x="3992612" y="6000750"/>
+            <a:off x="3992612" y="6030516"/>
             <a:ext cx="4063603" cy="400050"/>
           </a:xfrm>
           <a:prstGeom prst="rect">
@@ -3395,8 +3395,8 @@
         </p:nvSpPr>
         <p:spPr>
           <a:xfrm>
-            <a:off x="4413945" y="6534150"/>
-            <a:ext cx="2715339" cy="304800"/>
+            <a:off x="4413945" y="6563916"/>
+            <a:ext cx="2715339" cy="245269"/>
           </a:xfrm>
           <a:prstGeom prst="rect">
             <a:avLst/>
@@ -3407,7 +3407,11 @@
           <a:bodyPr wrap="none" anchor="t" lIns="0" rIns="0" tIns="0" bIns="0"/>
           <a:lstStyle/>
           <a:p>
-            <a:pPr algn="l"/>
+            <a:pPr algn="l">
+              <a:lnSpc>
+                <a:spcPct val="92000"/>
+              </a:lnSpc>
+            </a:pPr>
             <a:r>
               <a:rPr sz="2100" i="1" b="0">
                 <a:solidFill>
@@ -3438,7 +3442,7 @@
         </p:blipFill>
         <p:spPr>
           <a:xfrm>
-            <a:off x="4191000" y="3448050"/>
+            <a:off x="4191000" y="3477816"/>
             <a:ext cx="1905000" cy="1905000"/>
           </a:xfrm>
           <a:prstGeom prst="rect">
